--- a/UC1_Security_Pipeline_Demo.pptx
+++ b/UC1_Security_Pipeline_Demo.pptx
@@ -7091,7 +7091,7 @@
                   <a:srgbClr val="0D9488"/>
                 </a:solidFill>
               </a:rPr>
-              <a:t>The pipeline generates a ready-to-use GitHub Actions workflow — one copy, and it runs forever</a:t>
+              <a:t>GitHub Actions is live in this repo — and Claude Code can drive the pipeline via MCP</a:t>
             </a:r>
           </a:p>
         </p:txBody>
@@ -7202,7 +7202,7 @@
                   <a:srgbClr val="0F2D5C"/>
                 </a:solidFill>
               </a:rPr>
-              <a:t>How teams use it:</a:t>
+              <a:t>GitHub Actions (already live):</a:t>
             </a:r>
           </a:p>
         </p:txBody>
@@ -7216,7 +7216,7 @@
         <p:spPr>
           <a:xfrm>
             <a:off x="365760" y="1874519"/>
-            <a:ext cx="5029200" cy="3017520"/>
+            <a:ext cx="5029200" cy="2743200"/>
           </a:xfrm>
           <a:prstGeom prst="rect">
             <a:avLst/>
@@ -7231,7 +7231,7 @@
           <a:p>
             <a:pPr>
               <a:spcAft>
-                <a:spcPts val="900"/>
+                <a:spcPts val="800"/>
               </a:spcAft>
             </a:pPr>
             <a:r>
@@ -7240,13 +7240,13 @@
                   <a:srgbClr val="16A34A"/>
                 </a:solidFill>
               </a:rPr>
-              <a:t>  ✔  Run manually for a one-off security check on any repo</a:t>
+              <a:t>  ✔  Workflow at .github/workflows/security-scan.yml — active now</a:t>
             </a:r>
           </a:p>
           <a:p>
             <a:pPr>
               <a:spcAft>
-                <a:spcPts val="900"/>
+                <a:spcPts val="800"/>
               </a:spcAft>
             </a:pPr>
             <a:r>
@@ -7255,13 +7255,13 @@
                   <a:srgbClr val="16A34A"/>
                 </a:solidFill>
               </a:rPr>
-              <a:t>  ✔  Set up on GitHub Actions to run on every code push</a:t>
+              <a:t>  ✔  Triggers on push to main, manual run, and weekly Monday scan</a:t>
             </a:r>
           </a:p>
           <a:p>
             <a:pPr>
               <a:spcAft>
-                <a:spcPts val="900"/>
+                <a:spcPts val="800"/>
               </a:spcAft>
             </a:pPr>
             <a:r>
@@ -7270,13 +7270,13 @@
                   <a:srgbClr val="16A34A"/>
                 </a:solidFill>
               </a:rPr>
-              <a:t>  ✔  Schedule weekly scans to catch newly published CVEs</a:t>
+              <a:t>  ✔  Add DEMO_REPO_PAT secret to enable live PR creation</a:t>
             </a:r>
           </a:p>
           <a:p>
             <a:pPr>
               <a:spcAft>
-                <a:spcPts val="900"/>
+                <a:spcPts val="800"/>
               </a:spcAft>
             </a:pPr>
             <a:r>
@@ -7285,13 +7285,13 @@
                   <a:srgbClr val="16A34A"/>
                 </a:solidFill>
               </a:rPr>
-              <a:t>  ✔  Enforce as a merge gate — block PRs if policy fails</a:t>
+              <a:t>  ✔  Also generates security-scan.yml for any other target repo</a:t>
             </a:r>
           </a:p>
           <a:p>
             <a:pPr>
               <a:spcAft>
-                <a:spcPts val="900"/>
+                <a:spcPts val="800"/>
               </a:spcAft>
             </a:pPr>
             <a:r>
@@ -7300,7 +7300,7 @@
                   <a:srgbClr val="16A34A"/>
                 </a:solidFill>
               </a:rPr>
-              <a:t>  ✔  Use in Jenkins, GitLab CI, or Azure DevOps equally</a:t>
+              <a:t>  ✔  Works in Jenkins, GitLab CI, and Azure DevOps too</a:t>
             </a:r>
           </a:p>
         </p:txBody>
@@ -7313,7 +7313,7 @@
         </p:nvSpPr>
         <p:spPr>
           <a:xfrm>
-            <a:off x="365760" y="5029200"/>
+            <a:off x="365760" y="4754880"/>
             <a:ext cx="5029200" cy="365760"/>
           </a:xfrm>
           <a:prstGeom prst="rect">
@@ -7331,10 +7331,10 @@
             <a:r>
               <a:rPr sz="1600" b="1" i="0">
                 <a:solidFill>
-                  <a:srgbClr val="0F2D5C"/>
-                </a:solidFill>
-              </a:rPr>
-              <a:t>What is auto-generated:</a:t>
+                  <a:srgbClr val="0D9488"/>
+                </a:solidFill>
+              </a:rPr>
+              <a:t>MCP Server (Claude Code):</a:t>
             </a:r>
           </a:p>
         </p:txBody>
@@ -7347,8 +7347,8 @@
         </p:nvSpPr>
         <p:spPr>
           <a:xfrm>
-            <a:off x="365760" y="5440680"/>
-            <a:ext cx="5029200" cy="1234440"/>
+            <a:off x="365760" y="5166360"/>
+            <a:ext cx="5029200" cy="1463040"/>
           </a:xfrm>
           <a:prstGeom prst="rect">
             <a:avLst/>
@@ -7363,61 +7363,61 @@
           <a:p>
             <a:pPr>
               <a:spcAft>
-                <a:spcPts val="500"/>
+                <a:spcPts val="400"/>
               </a:spcAft>
             </a:pPr>
             <a:r>
-              <a:rPr sz="1400">
+              <a:rPr sz="1300">
                 <a:solidFill>
                   <a:srgbClr val="1F2937"/>
                 </a:solidFill>
               </a:rPr>
-              <a:t>      •   security-scan.yml  →  copy to .github/workflows/ in your repo</a:t>
+              <a:t>      •   scan_repo  —  run full pipeline from a conversation</a:t>
             </a:r>
           </a:p>
           <a:p>
             <a:pPr>
               <a:spcAft>
-                <a:spcPts val="500"/>
+                <a:spcPts val="400"/>
               </a:spcAft>
             </a:pPr>
             <a:r>
-              <a:rPr sz="1400">
+              <a:rPr sz="1300">
                 <a:solidFill>
                   <a:srgbClr val="1F2937"/>
                 </a:solidFill>
               </a:rPr>
-              <a:t>      •   Runs full pipeline on push, PR, and weekly schedule</a:t>
+              <a:t>      •   get_health_report  /  get_cve_summary  /  get_policy_status</a:t>
             </a:r>
           </a:p>
           <a:p>
             <a:pPr>
               <a:spcAft>
-                <a:spcPts val="500"/>
+                <a:spcPts val="400"/>
               </a:spcAft>
             </a:pPr>
             <a:r>
-              <a:rPr sz="1400">
+              <a:rPr sz="1300">
                 <a:solidFill>
                   <a:srgbClr val="1F2937"/>
                 </a:solidFill>
               </a:rPr>
-              <a:t>      •   Posts policy gate check on pull requests</a:t>
+              <a:t>      •   create_remediation_prs  —  create GitHub PRs via Claude</a:t>
             </a:r>
           </a:p>
           <a:p>
             <a:pPr>
               <a:spcAft>
-                <a:spcPts val="500"/>
+                <a:spcPts val="400"/>
               </a:spcAft>
             </a:pPr>
             <a:r>
-              <a:rPr sz="1400">
-                <a:solidFill>
-                  <a:srgbClr val="1F2937"/>
-                </a:solidFill>
-              </a:rPr>
-              <a:t>      •   Uploads HTML report as a build artifact</a:t>
+              <a:rPr sz="1100" i="1">
+                <a:solidFill>
+                  <a:srgbClr val="94A3B8"/>
+                </a:solidFill>
+              </a:rPr>
+              <a:t>Pre-configured in .mcp.json — no setup needed</a:t>
             </a:r>
           </a:p>
         </p:txBody>
@@ -7618,7 +7618,7 @@
                   <a:srgbClr val="0F2D5C"/>
                 </a:solidFill>
               </a:rPr>
-              <a:t>Developer pushes code</a:t>
+              <a:t>Push to main branch</a:t>
             </a:r>
           </a:p>
         </p:txBody>
@@ -7686,7 +7686,7 @@
                   <a:srgbClr val="0D9488"/>
                 </a:solidFill>
               </a:rPr>
-              <a:t>HTML report available as download</a:t>
+              <a:t>HTML report artifact uploaded</a:t>
             </a:r>
           </a:p>
         </p:txBody>
@@ -7808,7 +7808,7 @@
                   <a:srgbClr val="0F2D5C"/>
                 </a:solidFill>
               </a:rPr>
-              <a:t>Pull Request opened</a:t>
+              <a:t>Manual workflow dispatch</a:t>
             </a:r>
           </a:p>
         </p:txBody>
@@ -7842,7 +7842,7 @@
                   <a:srgbClr val="1F2937"/>
                 </a:solidFill>
               </a:rPr>
-              <a:t>Policy gate check runs</a:t>
+              <a:t>Scan + optional PR creation</a:t>
             </a:r>
           </a:p>
         </p:txBody>
@@ -7876,7 +7876,7 @@
                   <a:srgbClr val="0D9488"/>
                 </a:solidFill>
               </a:rPr>
-              <a:t>PR blocked if policy FAIL</a:t>
+              <a:t>PR merged or flagged for review</a:t>
             </a:r>
           </a:p>
         </p:txBody>
@@ -7998,7 +7998,7 @@
                   <a:srgbClr val="0F2D5C"/>
                 </a:solidFill>
               </a:rPr>
-              <a:t>Every Sunday 2 AM</a:t>
+              <a:t>Every Monday 02:00 UTC</a:t>
             </a:r>
           </a:p>
         </p:txBody>
@@ -8066,7 +8066,7 @@
                   <a:srgbClr val="0D9488"/>
                 </a:solidFill>
               </a:rPr>
-              <a:t>Team notified of new findings</a:t>
+              <a:t>Findings caught before exploitation</a:t>
             </a:r>
           </a:p>
         </p:txBody>
@@ -8188,7 +8188,7 @@
                   <a:srgbClr val="0F2D5C"/>
                 </a:solidFill>
               </a:rPr>
-              <a:t>Manual: run_pipeline.py</a:t>
+              <a:t>Claude: scan_repo (MCP)</a:t>
             </a:r>
           </a:p>
         </p:txBody>
@@ -8222,7 +8222,7 @@
                   <a:srgbClr val="1F2937"/>
                 </a:solidFill>
               </a:rPr>
-              <a:t>Instant scan of any GitHub repo</a:t>
+              <a:t>Full pipeline via conversation</a:t>
             </a:r>
           </a:p>
         </p:txBody>
@@ -8256,7 +8256,7 @@
                   <a:srgbClr val="0D9488"/>
                 </a:solidFill>
               </a:rPr>
-              <a:t>Report in &lt; 90 seconds</a:t>
+              <a:t>Health report returned instantly</a:t>
             </a:r>
           </a:p>
         </p:txBody>
@@ -9947,7 +9947,7 @@
                   <a:srgbClr val="94A3B8"/>
                 </a:solidFill>
               </a:rPr>
-              <a:t>Demo repo: github.com/SRGuptha/uc1-security-demo  ·  Docs: SETUP.md  ·  Guide: PIPELINE_GUIDE.md</a:t>
+              <a:t>Demo repo: github.com/SRGuptthha/uc1-security-demo  ·  Docs: SETUP.md  ·  Guide: PIPELINE_GUIDE.md</a:t>
             </a:r>
           </a:p>
         </p:txBody>
@@ -20045,7 +20045,7 @@
                   <a:srgbClr val="0D9488"/>
                 </a:solidFill>
               </a:rPr>
-              <a:t>Scanned: github.com/SRGuptha/uc1-security-demo  |  Language: Java / Maven  |  Duration: &lt; 90 seconds</a:t>
+              <a:t>Scanned: github.com/SRGuptthha/uc1-security-demo  |  Language: Java / Maven  |  Duration: &lt; 90 seconds</a:t>
             </a:r>
           </a:p>
         </p:txBody>
